--- a/assets/img/portfolio/cards-portifolio.pptx
+++ b/assets/img/portfolio/cards-portifolio.pptx
@@ -693,7 +693,7 @@
           <a:p>
             <a:fld id="{28EA16E0-01DB-4CA7-B5A5-2C288B23FD35}" type="datetimeFigureOut">
               <a:rPr lang="pt-BR" smtClean="0"/>
-              <a:t>11/12/2023</a:t>
+              <a:t>10/07/2024</a:t>
             </a:fld>
             <a:endParaRPr lang="pt-BR"/>
           </a:p>
@@ -891,7 +891,7 @@
           <a:p>
             <a:fld id="{28EA16E0-01DB-4CA7-B5A5-2C288B23FD35}" type="datetimeFigureOut">
               <a:rPr lang="pt-BR" smtClean="0"/>
-              <a:t>11/12/2023</a:t>
+              <a:t>10/07/2024</a:t>
             </a:fld>
             <a:endParaRPr lang="pt-BR"/>
           </a:p>
@@ -1099,7 +1099,7 @@
           <a:p>
             <a:fld id="{28EA16E0-01DB-4CA7-B5A5-2C288B23FD35}" type="datetimeFigureOut">
               <a:rPr lang="pt-BR" smtClean="0"/>
-              <a:t>11/12/2023</a:t>
+              <a:t>10/07/2024</a:t>
             </a:fld>
             <a:endParaRPr lang="pt-BR"/>
           </a:p>
@@ -1297,7 +1297,7 @@
           <a:p>
             <a:fld id="{28EA16E0-01DB-4CA7-B5A5-2C288B23FD35}" type="datetimeFigureOut">
               <a:rPr lang="pt-BR" smtClean="0"/>
-              <a:t>11/12/2023</a:t>
+              <a:t>10/07/2024</a:t>
             </a:fld>
             <a:endParaRPr lang="pt-BR"/>
           </a:p>
@@ -1572,7 +1572,7 @@
           <a:p>
             <a:fld id="{28EA16E0-01DB-4CA7-B5A5-2C288B23FD35}" type="datetimeFigureOut">
               <a:rPr lang="pt-BR" smtClean="0"/>
-              <a:t>11/12/2023</a:t>
+              <a:t>10/07/2024</a:t>
             </a:fld>
             <a:endParaRPr lang="pt-BR"/>
           </a:p>
@@ -1837,7 +1837,7 @@
           <a:p>
             <a:fld id="{28EA16E0-01DB-4CA7-B5A5-2C288B23FD35}" type="datetimeFigureOut">
               <a:rPr lang="pt-BR" smtClean="0"/>
-              <a:t>11/12/2023</a:t>
+              <a:t>10/07/2024</a:t>
             </a:fld>
             <a:endParaRPr lang="pt-BR"/>
           </a:p>
@@ -2249,7 +2249,7 @@
           <a:p>
             <a:fld id="{28EA16E0-01DB-4CA7-B5A5-2C288B23FD35}" type="datetimeFigureOut">
               <a:rPr lang="pt-BR" smtClean="0"/>
-              <a:t>11/12/2023</a:t>
+              <a:t>10/07/2024</a:t>
             </a:fld>
             <a:endParaRPr lang="pt-BR"/>
           </a:p>
@@ -2390,7 +2390,7 @@
           <a:p>
             <a:fld id="{28EA16E0-01DB-4CA7-B5A5-2C288B23FD35}" type="datetimeFigureOut">
               <a:rPr lang="pt-BR" smtClean="0"/>
-              <a:t>11/12/2023</a:t>
+              <a:t>10/07/2024</a:t>
             </a:fld>
             <a:endParaRPr lang="pt-BR"/>
           </a:p>
@@ -2503,7 +2503,7 @@
           <a:p>
             <a:fld id="{28EA16E0-01DB-4CA7-B5A5-2C288B23FD35}" type="datetimeFigureOut">
               <a:rPr lang="pt-BR" smtClean="0"/>
-              <a:t>11/12/2023</a:t>
+              <a:t>10/07/2024</a:t>
             </a:fld>
             <a:endParaRPr lang="pt-BR"/>
           </a:p>
@@ -2814,7 +2814,7 @@
           <a:p>
             <a:fld id="{28EA16E0-01DB-4CA7-B5A5-2C288B23FD35}" type="datetimeFigureOut">
               <a:rPr lang="pt-BR" smtClean="0"/>
-              <a:t>11/12/2023</a:t>
+              <a:t>10/07/2024</a:t>
             </a:fld>
             <a:endParaRPr lang="pt-BR"/>
           </a:p>
@@ -3102,7 +3102,7 @@
           <a:p>
             <a:fld id="{28EA16E0-01DB-4CA7-B5A5-2C288B23FD35}" type="datetimeFigureOut">
               <a:rPr lang="pt-BR" smtClean="0"/>
-              <a:t>11/12/2023</a:t>
+              <a:t>10/07/2024</a:t>
             </a:fld>
             <a:endParaRPr lang="pt-BR"/>
           </a:p>
@@ -3343,7 +3343,7 @@
           <a:p>
             <a:fld id="{28EA16E0-01DB-4CA7-B5A5-2C288B23FD35}" type="datetimeFigureOut">
               <a:rPr lang="pt-BR" smtClean="0"/>
-              <a:t>11/12/2023</a:t>
+              <a:t>10/07/2024</a:t>
             </a:fld>
             <a:endParaRPr lang="pt-BR"/>
           </a:p>
@@ -3810,7 +3810,7 @@
         <p:spPr>
           <a:xfrm>
             <a:off x="0" y="1262452"/>
-            <a:ext cx="6849448" cy="1015663"/>
+            <a:ext cx="6849448" cy="892552"/>
           </a:xfrm>
           <a:prstGeom prst="rect">
             <a:avLst/>
@@ -3825,7 +3825,7 @@
           <a:p>
             <a:pPr algn="ctr"/>
             <a:r>
-              <a:rPr lang="pt-BR" sz="6000" b="1" dirty="0">
+              <a:rPr lang="pt-BR" sz="5000" b="1" dirty="0">
                 <a:solidFill>
                   <a:srgbClr val="0563BB"/>
                 </a:solidFill>
@@ -3833,7 +3833,7 @@
                 <a:ea typeface="Verdana" panose="020B0604030504040204" pitchFamily="34" charset="0"/>
                 <a:cs typeface="Arial" panose="020B0604020202020204" pitchFamily="34" charset="0"/>
               </a:rPr>
-              <a:t>CLUSTERING</a:t>
+              <a:t>CLUSTERIZACIÓN</a:t>
             </a:r>
           </a:p>
         </p:txBody>
@@ -3853,7 +3853,7 @@
         <p:spPr>
           <a:xfrm>
             <a:off x="0" y="2462781"/>
-            <a:ext cx="6849448" cy="769441"/>
+            <a:ext cx="6849448" cy="1446550"/>
           </a:xfrm>
           <a:prstGeom prst="rect">
             <a:avLst/>
@@ -3873,7 +3873,7 @@
                 <a:ea typeface="Verdana" panose="020B0604030504040204" pitchFamily="34" charset="0"/>
                 <a:cs typeface="Arial" panose="020B0604020202020204" pitchFamily="34" charset="0"/>
               </a:rPr>
-              <a:t>Green Growth </a:t>
+              <a:t>Indicadores de </a:t>
             </a:r>
             <a:r>
               <a:rPr lang="pt-BR" sz="4400" dirty="0" err="1">
@@ -3881,13 +3881,16 @@
                 <a:ea typeface="Verdana" panose="020B0604030504040204" pitchFamily="34" charset="0"/>
                 <a:cs typeface="Arial" panose="020B0604020202020204" pitchFamily="34" charset="0"/>
               </a:rPr>
-              <a:t>indicators</a:t>
-            </a:r>
-            <a:endParaRPr lang="pt-BR" sz="4400" dirty="0">
-              <a:latin typeface="Arial" panose="020B0604020202020204" pitchFamily="34" charset="0"/>
-              <a:ea typeface="Verdana" panose="020B0604030504040204" pitchFamily="34" charset="0"/>
-              <a:cs typeface="Arial" panose="020B0604020202020204" pitchFamily="34" charset="0"/>
-            </a:endParaRPr>
+              <a:t>Crecimiento</a:t>
+            </a:r>
+            <a:r>
+              <a:rPr lang="pt-BR" sz="4400" dirty="0">
+                <a:latin typeface="Arial" panose="020B0604020202020204" pitchFamily="34" charset="0"/>
+                <a:ea typeface="Verdana" panose="020B0604030504040204" pitchFamily="34" charset="0"/>
+                <a:cs typeface="Arial" panose="020B0604020202020204" pitchFamily="34" charset="0"/>
+              </a:rPr>
+              <a:t> Verde</a:t>
+            </a:r>
           </a:p>
         </p:txBody>
       </p:sp>
@@ -3970,8 +3973,8 @@
         </p:nvSpPr>
         <p:spPr>
           <a:xfrm>
-            <a:off x="0" y="1262452"/>
-            <a:ext cx="6096000" cy="1200329"/>
+            <a:off x="-1" y="1192879"/>
+            <a:ext cx="6530009" cy="1384995"/>
           </a:xfrm>
           <a:prstGeom prst="rect">
             <a:avLst/>
@@ -3986,7 +3989,7 @@
           <a:p>
             <a:pPr algn="ctr"/>
             <a:r>
-              <a:rPr lang="pt-BR" sz="7200" b="1" dirty="0">
+              <a:rPr lang="pt-BR" sz="4200" b="1" dirty="0">
                 <a:solidFill>
                   <a:srgbClr val="0563BB"/>
                 </a:solidFill>
@@ -3994,7 +3997,7 @@
                 <a:ea typeface="Verdana" panose="020B0604030504040204" pitchFamily="34" charset="0"/>
                 <a:cs typeface="Arial" panose="020B0604020202020204" pitchFamily="34" charset="0"/>
               </a:rPr>
-              <a:t>NLP</a:t>
+              <a:t>PROCESAMIENTO DE LENGUAJE NATURAL</a:t>
             </a:r>
           </a:p>
         </p:txBody>
@@ -4013,8 +4016,8 @@
         </p:nvSpPr>
         <p:spPr>
           <a:xfrm>
-            <a:off x="76200" y="2462781"/>
-            <a:ext cx="6096000" cy="1015663"/>
+            <a:off x="76199" y="2979616"/>
+            <a:ext cx="6530009" cy="769441"/>
           </a:xfrm>
           <a:prstGeom prst="rect">
             <a:avLst/>
@@ -4029,12 +4032,20 @@
           <a:p>
             <a:pPr algn="ctr"/>
             <a:r>
-              <a:rPr lang="pt-BR" sz="6000" dirty="0">
+              <a:rPr lang="pt-BR" sz="4400" dirty="0" err="1">
                 <a:latin typeface="Arial" panose="020B0604020202020204" pitchFamily="34" charset="0"/>
                 <a:ea typeface="Verdana" panose="020B0604030504040204" pitchFamily="34" charset="0"/>
                 <a:cs typeface="Arial" panose="020B0604020202020204" pitchFamily="34" charset="0"/>
               </a:rPr>
-              <a:t>Spell Checker</a:t>
+              <a:t>Corrector</a:t>
+            </a:r>
+            <a:r>
+              <a:rPr lang="pt-BR" sz="4400" dirty="0">
+                <a:latin typeface="Arial" panose="020B0604020202020204" pitchFamily="34" charset="0"/>
+                <a:ea typeface="Verdana" panose="020B0604030504040204" pitchFamily="34" charset="0"/>
+                <a:cs typeface="Arial" panose="020B0604020202020204" pitchFamily="34" charset="0"/>
+              </a:rPr>
+              <a:t> Ortográfico</a:t>
             </a:r>
           </a:p>
         </p:txBody>
@@ -4118,8 +4129,8 @@
         </p:nvSpPr>
         <p:spPr>
           <a:xfrm>
-            <a:off x="0" y="1262452"/>
-            <a:ext cx="6849448" cy="1015663"/>
+            <a:off x="0" y="994097"/>
+            <a:ext cx="6849448" cy="1938992"/>
           </a:xfrm>
           <a:prstGeom prst="rect">
             <a:avLst/>
@@ -4142,7 +4153,7 @@
                 <a:ea typeface="Verdana" panose="020B0604030504040204" pitchFamily="34" charset="0"/>
                 <a:cs typeface="Arial" panose="020B0604020202020204" pitchFamily="34" charset="0"/>
               </a:rPr>
-              <a:t>TIME SERIES</a:t>
+              <a:t>SERIES TEMPORALES</a:t>
             </a:r>
           </a:p>
         </p:txBody>
@@ -4161,7 +4172,7 @@
         </p:nvSpPr>
         <p:spPr>
           <a:xfrm>
-            <a:off x="0" y="2462781"/>
+            <a:off x="0" y="3297669"/>
             <a:ext cx="6849448" cy="769441"/>
           </a:xfrm>
           <a:prstGeom prst="rect">
@@ -4182,7 +4193,23 @@
                 <a:ea typeface="Verdana" panose="020B0604030504040204" pitchFamily="34" charset="0"/>
                 <a:cs typeface="Arial" panose="020B0604020202020204" pitchFamily="34" charset="0"/>
               </a:rPr>
-              <a:t>Covid-19 in São Paulo</a:t>
+              <a:t>Covid-19 </a:t>
+            </a:r>
+            <a:r>
+              <a:rPr lang="pt-BR" sz="4400" dirty="0" err="1">
+                <a:latin typeface="Arial" panose="020B0604020202020204" pitchFamily="34" charset="0"/>
+                <a:ea typeface="Verdana" panose="020B0604030504040204" pitchFamily="34" charset="0"/>
+                <a:cs typeface="Arial" panose="020B0604020202020204" pitchFamily="34" charset="0"/>
+              </a:rPr>
+              <a:t>en</a:t>
+            </a:r>
+            <a:r>
+              <a:rPr lang="pt-BR" sz="4400" dirty="0">
+                <a:latin typeface="Arial" panose="020B0604020202020204" pitchFamily="34" charset="0"/>
+                <a:ea typeface="Verdana" panose="020B0604030504040204" pitchFamily="34" charset="0"/>
+                <a:cs typeface="Arial" panose="020B0604020202020204" pitchFamily="34" charset="0"/>
+              </a:rPr>
+              <a:t> São Paulo</a:t>
             </a:r>
           </a:p>
         </p:txBody>

--- a/assets/img/portfolio/cards-portifolio.pptx
+++ b/assets/img/portfolio/cards-portifolio.pptx
@@ -4258,8 +4258,8 @@
         </p:nvSpPr>
         <p:spPr>
           <a:xfrm>
-            <a:off x="0" y="769441"/>
-            <a:ext cx="6849448" cy="1938992"/>
+            <a:off x="0" y="1145507"/>
+            <a:ext cx="6849448" cy="1754326"/>
           </a:xfrm>
           <a:prstGeom prst="rect">
             <a:avLst/>
@@ -4274,7 +4274,7 @@
           <a:p>
             <a:pPr algn="ctr"/>
             <a:r>
-              <a:rPr lang="pt-BR" sz="6000" b="1" dirty="0">
+              <a:rPr lang="pt-BR" sz="5200" b="1" dirty="0">
                 <a:solidFill>
                   <a:srgbClr val="0563BB"/>
                 </a:solidFill>
@@ -4282,7 +4282,7 @@
                 <a:ea typeface="Verdana" panose="020B0604030504040204" pitchFamily="34" charset="0"/>
                 <a:cs typeface="Arial" panose="020B0604020202020204" pitchFamily="34" charset="0"/>
               </a:rPr>
-              <a:t>ANOMALY DETECTION</a:t>
+              <a:t>DETECCIÓN DE ANOMALÍAS</a:t>
             </a:r>
           </a:p>
         </p:txBody>
@@ -4336,8 +4336,8 @@
         </p:nvSpPr>
         <p:spPr>
           <a:xfrm>
-            <a:off x="0" y="2703956"/>
-            <a:ext cx="6849448" cy="769441"/>
+            <a:off x="0" y="3271422"/>
+            <a:ext cx="6849448" cy="738664"/>
           </a:xfrm>
           <a:prstGeom prst="rect">
             <a:avLst/>
@@ -4352,31 +4352,39 @@
           <a:p>
             <a:pPr algn="ctr"/>
             <a:r>
-              <a:rPr lang="pt-BR" sz="4400" dirty="0" err="1">
+              <a:rPr lang="pt-BR" sz="4200" dirty="0">
                 <a:latin typeface="Arial" panose="020B0604020202020204" pitchFamily="34" charset="0"/>
                 <a:ea typeface="Verdana" panose="020B0604030504040204" pitchFamily="34" charset="0"/>
                 <a:cs typeface="Arial" panose="020B0604020202020204" pitchFamily="34" charset="0"/>
               </a:rPr>
-              <a:t>Frauds</a:t>
-            </a:r>
-            <a:r>
-              <a:rPr lang="pt-BR" sz="4400" dirty="0">
+              <a:t>Fraudes </a:t>
+            </a:r>
+            <a:r>
+              <a:rPr lang="pt-BR" sz="4200" dirty="0" err="1">
                 <a:latin typeface="Arial" panose="020B0604020202020204" pitchFamily="34" charset="0"/>
                 <a:ea typeface="Verdana" panose="020B0604030504040204" pitchFamily="34" charset="0"/>
                 <a:cs typeface="Arial" panose="020B0604020202020204" pitchFamily="34" charset="0"/>
               </a:rPr>
-              <a:t> in </a:t>
-            </a:r>
-            <a:r>
-              <a:rPr lang="pt-BR" sz="4400" dirty="0" err="1">
+              <a:t>en</a:t>
+            </a:r>
+            <a:r>
+              <a:rPr lang="pt-BR" sz="4200" dirty="0">
                 <a:latin typeface="Arial" panose="020B0604020202020204" pitchFamily="34" charset="0"/>
                 <a:ea typeface="Verdana" panose="020B0604030504040204" pitchFamily="34" charset="0"/>
                 <a:cs typeface="Arial" panose="020B0604020202020204" pitchFamily="34" charset="0"/>
               </a:rPr>
-              <a:t>an</a:t>
-            </a:r>
-            <a:r>
-              <a:rPr lang="pt-BR" sz="4400" dirty="0">
+              <a:t> </a:t>
+            </a:r>
+            <a:r>
+              <a:rPr lang="pt-BR" sz="4200" dirty="0" err="1">
+                <a:latin typeface="Arial" panose="020B0604020202020204" pitchFamily="34" charset="0"/>
+                <a:ea typeface="Verdana" panose="020B0604030504040204" pitchFamily="34" charset="0"/>
+                <a:cs typeface="Arial" panose="020B0604020202020204" pitchFamily="34" charset="0"/>
+              </a:rPr>
+              <a:t>un</a:t>
+            </a:r>
+            <a:r>
+              <a:rPr lang="pt-BR" sz="4200" dirty="0">
                 <a:latin typeface="Arial" panose="020B0604020202020204" pitchFamily="34" charset="0"/>
                 <a:ea typeface="Verdana" panose="020B0604030504040204" pitchFamily="34" charset="0"/>
                 <a:cs typeface="Arial" panose="020B0604020202020204" pitchFamily="34" charset="0"/>
@@ -4465,8 +4473,8 @@
         </p:nvSpPr>
         <p:spPr>
           <a:xfrm>
-            <a:off x="0" y="769441"/>
-            <a:ext cx="6849448" cy="1938992"/>
+            <a:off x="0" y="1157064"/>
+            <a:ext cx="6849448" cy="1692771"/>
           </a:xfrm>
           <a:prstGeom prst="rect">
             <a:avLst/>
@@ -4481,7 +4489,7 @@
           <a:p>
             <a:pPr algn="ctr"/>
             <a:r>
-              <a:rPr lang="pt-BR" sz="6000" b="1" dirty="0">
+              <a:rPr lang="pt-BR" sz="5200" b="1" dirty="0">
                 <a:solidFill>
                   <a:srgbClr val="0563BB"/>
                 </a:solidFill>
@@ -4489,7 +4497,7 @@
                 <a:ea typeface="Verdana" panose="020B0604030504040204" pitchFamily="34" charset="0"/>
                 <a:cs typeface="Arial" panose="020B0604020202020204" pitchFamily="34" charset="0"/>
               </a:rPr>
-              <a:t>OPERATIONAL RESEARCH</a:t>
+              <a:t>INVESTIGACIÓN OPERATIVA</a:t>
             </a:r>
           </a:p>
         </p:txBody>
@@ -4508,8 +4516,8 @@
         </p:nvSpPr>
         <p:spPr>
           <a:xfrm>
-            <a:off x="0" y="2703956"/>
-            <a:ext cx="6849448" cy="1446550"/>
+            <a:off x="0" y="3061764"/>
+            <a:ext cx="6849448" cy="1323439"/>
           </a:xfrm>
           <a:prstGeom prst="rect">
             <a:avLst/>
@@ -4524,13 +4532,66 @@
           <a:p>
             <a:pPr algn="ctr"/>
             <a:r>
-              <a:rPr lang="en-US" sz="4400" dirty="0">
+              <a:rPr lang="en-US" sz="4000" dirty="0" err="1">
                 <a:latin typeface="Arial" panose="020B0604020202020204" pitchFamily="34" charset="0"/>
                 <a:ea typeface="Verdana" panose="020B0604030504040204" pitchFamily="34" charset="0"/>
                 <a:cs typeface="Arial" panose="020B0604020202020204" pitchFamily="34" charset="0"/>
               </a:rPr>
-              <a:t>Vehicle Routing Problem with Heterogeneous Fleet</a:t>
-            </a:r>
+              <a:t>Ruteo</a:t>
+            </a:r>
+            <a:r>
+              <a:rPr lang="en-US" sz="4000" dirty="0">
+                <a:latin typeface="Arial" panose="020B0604020202020204" pitchFamily="34" charset="0"/>
+                <a:ea typeface="Verdana" panose="020B0604030504040204" pitchFamily="34" charset="0"/>
+                <a:cs typeface="Arial" panose="020B0604020202020204" pitchFamily="34" charset="0"/>
+              </a:rPr>
+              <a:t> de </a:t>
+            </a:r>
+            <a:r>
+              <a:rPr lang="en-US" sz="4000" dirty="0" err="1">
+                <a:latin typeface="Arial" panose="020B0604020202020204" pitchFamily="34" charset="0"/>
+                <a:ea typeface="Verdana" panose="020B0604030504040204" pitchFamily="34" charset="0"/>
+                <a:cs typeface="Arial" panose="020B0604020202020204" pitchFamily="34" charset="0"/>
+              </a:rPr>
+              <a:t>Vehículos</a:t>
+            </a:r>
+            <a:r>
+              <a:rPr lang="en-US" sz="4000" dirty="0">
+                <a:latin typeface="Arial" panose="020B0604020202020204" pitchFamily="34" charset="0"/>
+                <a:ea typeface="Verdana" panose="020B0604030504040204" pitchFamily="34" charset="0"/>
+                <a:cs typeface="Arial" panose="020B0604020202020204" pitchFamily="34" charset="0"/>
+              </a:rPr>
+              <a:t> con </a:t>
+            </a:r>
+            <a:r>
+              <a:rPr lang="en-US" sz="4000" dirty="0" err="1">
+                <a:latin typeface="Arial" panose="020B0604020202020204" pitchFamily="34" charset="0"/>
+                <a:ea typeface="Verdana" panose="020B0604030504040204" pitchFamily="34" charset="0"/>
+                <a:cs typeface="Arial" panose="020B0604020202020204" pitchFamily="34" charset="0"/>
+              </a:rPr>
+              <a:t>Flotas</a:t>
+            </a:r>
+            <a:r>
+              <a:rPr lang="en-US" sz="4000" dirty="0">
+                <a:latin typeface="Arial" panose="020B0604020202020204" pitchFamily="34" charset="0"/>
+                <a:ea typeface="Verdana" panose="020B0604030504040204" pitchFamily="34" charset="0"/>
+                <a:cs typeface="Arial" panose="020B0604020202020204" pitchFamily="34" charset="0"/>
+              </a:rPr>
+              <a:t> </a:t>
+            </a:r>
+            <a:r>
+              <a:rPr lang="en-US" sz="4000" dirty="0" err="1">
+                <a:latin typeface="Arial" panose="020B0604020202020204" pitchFamily="34" charset="0"/>
+                <a:ea typeface="Verdana" panose="020B0604030504040204" pitchFamily="34" charset="0"/>
+                <a:cs typeface="Arial" panose="020B0604020202020204" pitchFamily="34" charset="0"/>
+              </a:rPr>
+              <a:t>Heterogéneas</a:t>
+            </a:r>
+            <a:endParaRPr lang="en-US" sz="4000" dirty="0">
+              <a:latin typeface="Arial" panose="020B0604020202020204" pitchFamily="34" charset="0"/>
+              <a:ea typeface="Verdana" panose="020B0604030504040204" pitchFamily="34" charset="0"/>
+              <a:cs typeface="Arial" panose="020B0604020202020204" pitchFamily="34" charset="0"/>
+            </a:endParaRPr>
           </a:p>
         </p:txBody>
       </p:sp>
